--- a/docs/decks/Radio_Meteor_Tracker.pptx
+++ b/docs/decks/Radio_Meteor_Tracker.pptx
@@ -22,6 +22,7 @@
     <p:sldId id="270" r:id="rId21"/>
     <p:sldId id="271" r:id="rId22"/>
     <p:sldId id="272" r:id="rId23"/>
+    <p:sldId id="273" r:id="rId24"/>
   </p:sldIdLst>
   <p:sldSz cx="12191695" cy="6858000" type="screen4x3"/>
   <p:notesSz cx="6858000" cy="9144000"/>
@@ -3316,7 +3317,7 @@
                   <a:srgbClr val="999999"/>
                 </a:solidFill>
               </a:rPr>
-              <a:t>code v1.4  ·  2026-07-12  ·  1/17</a:t>
+              <a:t>code v1.5  ·  2026-07-13  ·  1/18</a:t>
             </a:r>
           </a:p>
         </p:txBody>
@@ -3650,7 +3651,7 @@
                   <a:srgbClr val="999999"/>
                 </a:solidFill>
               </a:rPr>
-              <a:t>code v1.4  ·  2026-07-12  ·  10/17</a:t>
+              <a:t>code v1.5  ·  2026-07-13  ·  10/18</a:t>
             </a:r>
           </a:p>
         </p:txBody>
@@ -3993,7 +3994,7 @@
                   <a:srgbClr val="999999"/>
                 </a:solidFill>
               </a:rPr>
-              <a:t>code v1.4  ·  2026-07-12  ·  11/17</a:t>
+              <a:t>code v1.5  ·  2026-07-13  ·  11/18</a:t>
             </a:r>
           </a:p>
         </p:txBody>
@@ -4312,7 +4313,7 @@
                   <a:srgbClr val="999999"/>
                 </a:solidFill>
               </a:rPr>
-              <a:t>code v1.4  ·  2026-07-12  ·  12/17</a:t>
+              <a:t>code v1.5  ·  2026-07-13  ·  12/18</a:t>
             </a:r>
           </a:p>
         </p:txBody>
@@ -4676,7 +4677,7 @@
                   <a:srgbClr val="999999"/>
                 </a:solidFill>
               </a:rPr>
-              <a:t>code v1.4  ·  2026-07-12  ·  13/17</a:t>
+              <a:t>code v1.5  ·  2026-07-13  ·  13/18</a:t>
             </a:r>
           </a:p>
         </p:txBody>
@@ -4727,7 +4728,7 @@
                   <a:srgbClr val="1F77B4"/>
                 </a:solidFill>
               </a:rPr>
-              <a:t>Version roadmap</a:t>
+              <a:t>v1.5: Measuring exposure  (this release)</a:t>
             </a:r>
           </a:p>
         </p:txBody>
@@ -4808,7 +4809,22 @@
                   <a:srgbClr val="222222"/>
                 </a:solidFill>
               </a:rPr>
-              <a:t>- v1.0 - Baseline detector</a:t>
+              <a:t>- Every rate is counts / EXPOSURE -- so exposure has to be MEASURED.</a:t>
+            </a:r>
+          </a:p>
+          <a:p>
+            <a:pPr>
+              <a:spcAft>
+                <a:spcPts val="500"/>
+              </a:spcAft>
+            </a:pPr>
+            <a:r>
+              <a:rPr sz="1800">
+                <a:solidFill>
+                  <a:srgbClr val="C0392B"/>
+                </a:solidFill>
+              </a:rPr>
+              <a:t>- The trap it removes:</a:t>
             </a:r>
           </a:p>
           <a:p>
@@ -4820,10 +4836,25 @@
             <a:r>
               <a:rPr sz="1600">
                 <a:solidFill>
+                  <a:srgbClr val="C0392B"/>
+                </a:solidFill>
+              </a:rPr>
+              <a:t>  . diurnal.py used to INFER exposure from the span of logged events</a:t>
+            </a:r>
+          </a:p>
+          <a:p>
+            <a:pPr lvl="2">
+              <a:spcAft>
+                <a:spcPts val="500"/>
+              </a:spcAft>
+            </a:pPr>
+            <a:r>
+              <a:rPr sz="1400">
+                <a:solidFill>
                   <a:srgbClr val="555555"/>
                 </a:solidFill>
               </a:rPr>
-              <a:t>  . Band-power + EMA baseline + threshold/hysteresis -&gt; CSV log &amp; count.</a:t>
+              <a:t>  . ('the receiver was on whenever anything was logged').</a:t>
             </a:r>
           </a:p>
           <a:p>
@@ -4835,10 +4866,55 @@
             <a:r>
               <a:rPr sz="1600">
                 <a:solidFill>
+                  <a:srgbClr val="C0392B"/>
+                </a:solidFill>
+              </a:rPr>
+              <a:t>  . Observe only 22:00-06:00 for a week and that span covers the daytime</a:t>
+            </a:r>
+          </a:p>
+          <a:p>
+            <a:pPr lvl="2">
+              <a:spcAft>
+                <a:spcPts val="500"/>
+              </a:spcAft>
+            </a:pPr>
+            <a:r>
+              <a:rPr sz="1400">
+                <a:solidFill>
                   <a:srgbClr val="555555"/>
                 </a:solidFill>
               </a:rPr>
-              <a:t>  . Hardened: fixed gain, warm-up skip, duration bounds.</a:t>
+              <a:t>  . hours you never watched -- so they look observed-but-empty, their rate</a:t>
+            </a:r>
+          </a:p>
+          <a:p>
+            <a:pPr lvl="2">
+              <a:spcAft>
+                <a:spcPts val="500"/>
+              </a:spcAft>
+            </a:pPr>
+            <a:r>
+              <a:rPr sz="1400">
+                <a:solidFill>
+                  <a:srgbClr val="555555"/>
+                </a:solidFill>
+              </a:rPr>
+              <a:t>  . collapses, and you get a textbook diurnal curve (peak ~06h, trough ~18h)</a:t>
+            </a:r>
+          </a:p>
+          <a:p>
+            <a:pPr lvl="2">
+              <a:spcAft>
+                <a:spcPts val="500"/>
+              </a:spcAft>
+            </a:pPr>
+            <a:r>
+              <a:rPr sz="1400">
+                <a:solidFill>
+                  <a:srgbClr val="555555"/>
+                </a:solidFill>
+              </a:rPr>
+              <a:t>  . manufactured entirely by your own schedule. It looks like SUCCESS.</a:t>
             </a:r>
           </a:p>
           <a:p>
@@ -4850,10 +4926,10 @@
             <a:r>
               <a:rPr sz="1800">
                 <a:solidFill>
-                  <a:srgbClr val="222222"/>
-                </a:solidFill>
-              </a:rPr>
-              <a:t>- v1.1 - Trigger snapshots</a:t>
+                  <a:srgbClr val="2CA02C"/>
+                </a:solidFill>
+              </a:rPr>
+              <a:t>- The fix: uptime.py writes sessions.csv (append-only on/beat/off).</a:t>
             </a:r>
           </a:p>
           <a:p>
@@ -4865,10 +4941,70 @@
             <a:r>
               <a:rPr sz="1600">
                 <a:solidFill>
-                  <a:srgbClr val="555555"/>
-                </a:solidFill>
-              </a:rPr>
-              <a:t>  . Rolling IQ buffer; per-ping high-res spectrogram.</a:t>
+                  <a:srgbClr val="2CA02C"/>
+                </a:solidFill>
+              </a:rPr>
+              <a:t>  . Exposure EXCLUDES warm-up and USB reconnect gaps.</a:t>
+            </a:r>
+          </a:p>
+          <a:p>
+            <a:pPr lvl="1">
+              <a:spcAft>
+                <a:spcPts val="500"/>
+              </a:spcAft>
+            </a:pPr>
+            <a:r>
+              <a:rPr sz="1600">
+                <a:solidFill>
+                  <a:srgbClr val="2CA02C"/>
+                </a:solidFill>
+              </a:rPr>
+              <a:t>  . A crash costs one beat interval (60 s), not the session -- and never</a:t>
+            </a:r>
+          </a:p>
+          <a:p>
+            <a:pPr lvl="2">
+              <a:spcAft>
+                <a:spcPts val="500"/>
+              </a:spcAft>
+            </a:pPr>
+            <a:r>
+              <a:rPr sz="1400">
+                <a:solidFill>
+                  <a:srgbClr val="2CA02C"/>
+                </a:solidFill>
+              </a:rPr>
+              <a:t>  . counts the dead hours as observed.</a:t>
+            </a:r>
+          </a:p>
+          <a:p>
+            <a:pPr lvl="1">
+              <a:spcAft>
+                <a:spcPts val="500"/>
+              </a:spcAft>
+            </a:pPr>
+            <a:r>
+              <a:rPr sz="1600">
+                <a:solidFill>
+                  <a:srgbClr val="2CA02C"/>
+                </a:solidFill>
+              </a:rPr>
+              <a:t>  . diurnal.py integrates it; with no log it still runs but stamps the plot</a:t>
+            </a:r>
+          </a:p>
+          <a:p>
+            <a:pPr lvl="2">
+              <a:spcAft>
+                <a:spcPts val="500"/>
+              </a:spcAft>
+            </a:pPr>
+            <a:r>
+              <a:rPr sz="1400">
+                <a:solidFill>
+                  <a:srgbClr val="2CA02C"/>
+                </a:solidFill>
+              </a:rPr>
+              <a:t>  . 'EXPOSURE GUESSED' so a bad curve cannot travel quietly.</a:t>
             </a:r>
           </a:p>
           <a:p>
@@ -4880,10 +5016,10 @@
             <a:r>
               <a:rPr sz="1800">
                 <a:solidFill>
-                  <a:srgbClr val="222222"/>
-                </a:solidFill>
-              </a:rPr>
-              <a:t>- v1.2 - GUI, classification &amp; reporting</a:t>
+                  <a:srgbClr val="2CA02C"/>
+                </a:solidFill>
+              </a:rPr>
+              <a:t>- Verified: with a FLAT synthetic rate, the old method invents the curve;</a:t>
             </a:r>
           </a:p>
           <a:p>
@@ -4895,130 +5031,10 @@
             <a:r>
               <a:rPr sz="1600">
                 <a:solidFill>
-                  <a:srgbClr val="555555"/>
-                </a:solidFill>
-              </a:rPr>
-              <a:t>  . Threaded engine; live waterfall + counter + snapshot gallery.</a:t>
-            </a:r>
-          </a:p>
-          <a:p>
-            <a:pPr lvl="1">
-              <a:spcAft>
-                <a:spcPts val="500"/>
-              </a:spcAft>
-            </a:pPr>
-            <a:r>
-              <a:rPr sz="1600">
-                <a:solidFill>
-                  <a:srgbClr val="555555"/>
-                </a:solidFill>
-              </a:rPr>
-              <a:t>  . Heuristic meteor/aircraft/interference classifier; session reports.</a:t>
-            </a:r>
-          </a:p>
-          <a:p>
-            <a:pPr>
-              <a:spcAft>
-                <a:spcPts val="500"/>
-              </a:spcAft>
-            </a:pPr>
-            <a:r>
-              <a:rPr sz="1800">
-                <a:solidFill>
-                  <a:srgbClr val="222222"/>
-                </a:solidFill>
-              </a:rPr>
-              <a:t>- v1.3 - Tabbed UI + long-run robustness</a:t>
-            </a:r>
-          </a:p>
-          <a:p>
-            <a:pPr lvl="1">
-              <a:spcAft>
-                <a:spcPts val="500"/>
-              </a:spcAft>
-            </a:pPr>
-            <a:r>
-              <a:rPr sz="1600">
-                <a:solidFill>
-                  <a:srgbClr val="555555"/>
-                </a:solidFill>
-              </a:rPr>
-              <a:t>  . Live/Gallery tabs; auto-reconnect; async snapshots off the capture thread.</a:t>
-            </a:r>
-          </a:p>
-          <a:p>
-            <a:pPr>
-              <a:spcAft>
-                <a:spcPts val="500"/>
-              </a:spcAft>
-            </a:pPr>
-            <a:r>
-              <a:rPr sz="1800">
-                <a:solidFill>
-                  <a:srgbClr val="222222"/>
-                </a:solidFill>
-              </a:rPr>
-              <a:t>- v1.4 - Low-memory profile  (CURRENT)</a:t>
-            </a:r>
-          </a:p>
-          <a:p>
-            <a:pPr lvl="1">
-              <a:spcAft>
-                <a:spcPts val="500"/>
-              </a:spcAft>
-            </a:pPr>
-            <a:r>
-              <a:rPr sz="1600">
-                <a:solidFill>
-                  <a:srgbClr val="555555"/>
-                </a:solidFill>
-              </a:rPr>
-              <a:t>  . Fits the 1 GB Pi 3B+: byte-bounded queue, chunked FFT, circular ring,</a:t>
-            </a:r>
-          </a:p>
-          <a:p>
-            <a:pPr lvl="1">
-              <a:spcAft>
-                <a:spcPts val="500"/>
-              </a:spcAft>
-            </a:pPr>
-            <a:r>
-              <a:rPr sz="1600">
-                <a:solidFill>
-                  <a:srgbClr val="555555"/>
-                </a:solidFill>
-              </a:rPr>
-              <a:t>  . npz snapshot mode + PC-side rendering. config.py PROFILES['pi'].</a:t>
-            </a:r>
-          </a:p>
-          <a:p>
-            <a:pPr>
-              <a:spcAft>
-                <a:spcPts val="500"/>
-              </a:spcAft>
-            </a:pPr>
-            <a:r>
-              <a:rPr sz="1800">
-                <a:solidFill>
-                  <a:srgbClr val="222222"/>
-                </a:solidFill>
-              </a:rPr>
-              <a:t>- Next</a:t>
-            </a:r>
-          </a:p>
-          <a:p>
-            <a:pPr lvl="1">
-              <a:spcAft>
-                <a:spcPts val="500"/>
-              </a:spcAft>
-            </a:pPr>
-            <a:r>
-              <a:rPr sz="1600">
-                <a:solidFill>
-                  <a:srgbClr val="555555"/>
-                </a:solidFill>
-              </a:rPr>
-              <a:t>  . Real-hardware validation on a Pi; trained classifier; dark theme; .exe packaging.</a:t>
+                  <a:srgbClr val="2CA02C"/>
+                </a:solidFill>
+              </a:rPr>
+              <a:t>  . the new one recovers flat and leaves unobserved hours BLANK.</a:t>
             </a:r>
           </a:p>
         </p:txBody>
@@ -5085,7 +5101,7 @@
                   <a:srgbClr val="999999"/>
                 </a:solidFill>
               </a:rPr>
-              <a:t>code v1.4  ·  2026-07-12  ·  14/17</a:t>
+              <a:t>code v1.5  ·  2026-07-13  ·  14/18</a:t>
             </a:r>
           </a:p>
         </p:txBody>
@@ -5136,7 +5152,7 @@
                   <a:srgbClr val="1F77B4"/>
                 </a:solidFill>
               </a:rPr>
-              <a:t>An observing session: a meteor shower night</a:t>
+              <a:t>Version roadmap</a:t>
             </a:r>
           </a:p>
         </p:txBody>
@@ -5217,7 +5233,37 @@
                   <a:srgbClr val="222222"/>
                 </a:solidFill>
               </a:rPr>
-              <a:t>- Example: Perseids peak, night of Aug 12-13 (also Delta Aquariids late Jul).</a:t>
+              <a:t>- v1.0 - Baseline detector</a:t>
+            </a:r>
+          </a:p>
+          <a:p>
+            <a:pPr lvl="1">
+              <a:spcAft>
+                <a:spcPts val="500"/>
+              </a:spcAft>
+            </a:pPr>
+            <a:r>
+              <a:rPr sz="1600">
+                <a:solidFill>
+                  <a:srgbClr val="555555"/>
+                </a:solidFill>
+              </a:rPr>
+              <a:t>  . Band-power + EMA baseline + threshold/hysteresis -&gt; CSV log &amp; count.</a:t>
+            </a:r>
+          </a:p>
+          <a:p>
+            <a:pPr lvl="1">
+              <a:spcAft>
+                <a:spcPts val="500"/>
+              </a:spcAft>
+            </a:pPr>
+            <a:r>
+              <a:rPr sz="1600">
+                <a:solidFill>
+                  <a:srgbClr val="555555"/>
+                </a:solidFill>
+              </a:rPr>
+              <a:t>  . Hardened: fixed gain, warm-up skip, duration bounds.</a:t>
             </a:r>
           </a:p>
           <a:p>
@@ -5232,7 +5278,22 @@
                   <a:srgbClr val="222222"/>
                 </a:solidFill>
               </a:rPr>
-              <a:t>- Before: python fm_vacancy.py to confirm 104.3 still clear; check gain fixed.</a:t>
+              <a:t>- v1.1 - Trigger snapshots</a:t>
+            </a:r>
+          </a:p>
+          <a:p>
+            <a:pPr lvl="1">
+              <a:spcAft>
+                <a:spcPts val="500"/>
+              </a:spcAft>
+            </a:pPr>
+            <a:r>
+              <a:rPr sz="1600">
+                <a:solidFill>
+                  <a:srgbClr val="555555"/>
+                </a:solidFill>
+              </a:rPr>
+              <a:t>  . Rolling IQ buffer; per-ping high-res spectrogram.</a:t>
             </a:r>
           </a:p>
           <a:p>
@@ -5247,7 +5308,7 @@
                   <a:srgbClr val="222222"/>
                 </a:solidFill>
               </a:rPr>
-              <a:t>- Run: python meteor_detector.py continuously, e.g. 22:00 -&gt; 06:00 local.</a:t>
+              <a:t>- v1.2 - GUI, classification &amp; reporting</a:t>
             </a:r>
           </a:p>
           <a:p>
@@ -5262,7 +5323,22 @@
                   <a:srgbClr val="555555"/>
                 </a:solidFill>
               </a:rPr>
-              <a:t>  . Snapshots ON; CSV logging the whole night.</a:t>
+              <a:t>  . Threaded engine; live waterfall + counter + snapshot gallery.</a:t>
+            </a:r>
+          </a:p>
+          <a:p>
+            <a:pPr lvl="1">
+              <a:spcAft>
+                <a:spcPts val="500"/>
+              </a:spcAft>
+            </a:pPr>
+            <a:r>
+              <a:rPr sz="1600">
+                <a:solidFill>
+                  <a:srgbClr val="555555"/>
+                </a:solidFill>
+              </a:rPr>
+              <a:t>  . Heuristic meteor/aircraft/interference classifier; session reports.</a:t>
             </a:r>
           </a:p>
           <a:p>
@@ -5277,7 +5353,7 @@
                   <a:srgbClr val="222222"/>
                 </a:solidFill>
               </a:rPr>
-              <a:t>- Expect: ping rate RISES after local midnight toward dawn (Earth's leading</a:t>
+              <a:t>- v1.3 - Tabbed UI + long-run robustness</a:t>
             </a:r>
           </a:p>
           <a:p>
@@ -5292,7 +5368,7 @@
                   <a:srgbClr val="555555"/>
                 </a:solidFill>
               </a:rPr>
-              <a:t>  . side faces the meteor stream), and higher near the peak date.</a:t>
+              <a:t>  . Live/Gallery tabs; auto-reconnect; async snapshots off the capture thread.</a:t>
             </a:r>
           </a:p>
           <a:p>
@@ -5307,7 +5383,7 @@
                   <a:srgbClr val="222222"/>
                 </a:solidFill>
               </a:rPr>
-              <a:t>- Watch out: summer sporadic-E can mimic activity - real pings are brief;</a:t>
+              <a:t>- v1.4 - Low-memory profile</a:t>
             </a:r>
           </a:p>
           <a:p>
@@ -5322,7 +5398,22 @@
                   <a:srgbClr val="555555"/>
                 </a:solidFill>
               </a:rPr>
-              <a:t>  . E-skip openings last minutes and show in snapshots as sustained signal.</a:t>
+              <a:t>  . Fits the 1 GB Pi 3B+: byte-bounded queue, chunked FFT, circular ring,</a:t>
+            </a:r>
+          </a:p>
+          <a:p>
+            <a:pPr lvl="1">
+              <a:spcAft>
+                <a:spcPts val="500"/>
+              </a:spcAft>
+            </a:pPr>
+            <a:r>
+              <a:rPr sz="1600">
+                <a:solidFill>
+                  <a:srgbClr val="555555"/>
+                </a:solidFill>
+              </a:rPr>
+              <a:t>  . npz snapshot mode + PC-side rendering. config.py PROFILES['pi'].</a:t>
             </a:r>
           </a:p>
           <a:p>
@@ -5337,7 +5428,52 @@
                   <a:srgbClr val="222222"/>
                 </a:solidFill>
               </a:rPr>
-              <a:t>- After: review snapshots, classify, plot pings-per-hour vs time &amp; vs sporadic rate.</a:t>
+              <a:t>- v1.5 - Measured exposure  (CURRENT)</a:t>
+            </a:r>
+          </a:p>
+          <a:p>
+            <a:pPr lvl="1">
+              <a:spcAft>
+                <a:spcPts val="500"/>
+              </a:spcAft>
+            </a:pPr>
+            <a:r>
+              <a:rPr sz="1600">
+                <a:solidFill>
+                  <a:srgbClr val="555555"/>
+                </a:solidFill>
+              </a:rPr>
+              <a:t>  . sessions.csv uptime log; diurnal rates divide by REAL observing hours.</a:t>
+            </a:r>
+          </a:p>
+          <a:p>
+            <a:pPr>
+              <a:spcAft>
+                <a:spcPts val="500"/>
+              </a:spcAft>
+            </a:pPr>
+            <a:r>
+              <a:rPr sz="1800">
+                <a:solidFill>
+                  <a:srgbClr val="222222"/>
+                </a:solidFill>
+              </a:rPr>
+              <a:t>- Next</a:t>
+            </a:r>
+          </a:p>
+          <a:p>
+            <a:pPr lvl="1">
+              <a:spcAft>
+                <a:spcPts val="500"/>
+              </a:spcAft>
+            </a:pPr>
+            <a:r>
+              <a:rPr sz="1600">
+                <a:solidFill>
+                  <a:srgbClr val="555555"/>
+                </a:solidFill>
+              </a:rPr>
+              <a:t>  . Real-hardware validation on a Pi; trained classifier; dark theme; .exe packaging.</a:t>
             </a:r>
           </a:p>
         </p:txBody>
@@ -5404,7 +5540,7 @@
                   <a:srgbClr val="999999"/>
                 </a:solidFill>
               </a:rPr>
-              <a:t>code v1.4  ·  2026-07-12  ·  15/17</a:t>
+              <a:t>code v1.5  ·  2026-07-13  ·  15/18</a:t>
             </a:r>
           </a:p>
         </p:txBody>
@@ -5455,7 +5591,7 @@
                   <a:srgbClr val="1F77B4"/>
                 </a:solidFill>
               </a:rPr>
-              <a:t>Next steps</a:t>
+              <a:t>An observing session: a meteor shower night</a:t>
             </a:r>
           </a:p>
         </p:txBody>
@@ -5536,7 +5672,7 @@
                   <a:srgbClr val="222222"/>
                 </a:solidFill>
               </a:rPr>
-              <a:t>- Antenna upgrade (biggest sensitivity gain): dipole/Yagi aimed SE to Boise.</a:t>
+              <a:t>- Example: Perseids peak, night of Aug 12-13 (also Delta Aquariids late Jul).</a:t>
             </a:r>
           </a:p>
           <a:p>
@@ -5551,7 +5687,22 @@
                   <a:srgbClr val="222222"/>
                 </a:solidFill>
               </a:rPr>
-              <a:t>- Real-hardware validation of v1.3/v1.4 -- all of it is so far verified HEADLESSLY</a:t>
+              <a:t>- Before: python fm_vacancy.py to confirm 104.3 still clear; check gain fixed.</a:t>
+            </a:r>
+          </a:p>
+          <a:p>
+            <a:pPr>
+              <a:spcAft>
+                <a:spcPts val="500"/>
+              </a:spcAft>
+            </a:pPr>
+            <a:r>
+              <a:rPr sz="1800">
+                <a:solidFill>
+                  <a:srgbClr val="222222"/>
+                </a:solidFill>
+              </a:rPr>
+              <a:t>- Run: python meteor_detector.py continuously, e.g. 22:00 -&gt; 06:00 local.</a:t>
             </a:r>
           </a:p>
           <a:p>
@@ -5566,7 +5717,7 @@
                   <a:srgbClr val="555555"/>
                 </a:solidFill>
               </a:rPr>
-              <a:t>  . on Windows against synthetic sources; the Pi run is still pending.</a:t>
+              <a:t>  . Snapshots ON; CSV logging the whole night.</a:t>
             </a:r>
           </a:p>
           <a:p>
@@ -5581,7 +5732,22 @@
                   <a:srgbClr val="222222"/>
                 </a:solidFill>
               </a:rPr>
-              <a:t>- Frequency calibration: rtl_test -p to set freq_correction_ppm.</a:t>
+              <a:t>- Expect: ping rate RISES after local midnight toward dawn (Earth's leading</a:t>
+            </a:r>
+          </a:p>
+          <a:p>
+            <a:pPr lvl="1">
+              <a:spcAft>
+                <a:spcPts val="500"/>
+              </a:spcAft>
+            </a:pPr>
+            <a:r>
+              <a:rPr sz="1600">
+                <a:solidFill>
+                  <a:srgbClr val="555555"/>
+                </a:solidFill>
+              </a:rPr>
+              <a:t>  . side faces the meteor stream), and higher near the peak date.</a:t>
             </a:r>
           </a:p>
           <a:p>
@@ -5596,7 +5762,7 @@
                   <a:srgbClr val="222222"/>
                 </a:solidFill>
               </a:rPr>
-              <a:t>- Longer unattended runs (overnight) to gather real event statistics, then</a:t>
+              <a:t>- Watch out: summer sporadic-E can mimic activity - real pings are brief;</a:t>
             </a:r>
           </a:p>
           <a:p>
@@ -5611,7 +5777,7 @@
                   <a:srgbClr val="555555"/>
                 </a:solidFill>
               </a:rPr>
-              <a:t>  . tune classifier thresholds against confirmed events. Target: Perseids Aug 12-13.</a:t>
+              <a:t>  . E-skip openings last minutes and show in snapshots as sustained signal.</a:t>
             </a:r>
           </a:p>
           <a:p>
@@ -5626,37 +5792,7 @@
                   <a:srgbClr val="222222"/>
                 </a:solidFill>
               </a:rPr>
-              <a:t>- Later: trained classifier; dark theme + MHz axis polish; package as an .exe.</a:t>
-            </a:r>
-          </a:p>
-          <a:p>
-            <a:pPr>
-              <a:spcAft>
-                <a:spcPts val="500"/>
-              </a:spcAft>
-            </a:pPr>
-            <a:r>
-              <a:rPr sz="1800">
-                <a:solidFill>
-                  <a:srgbClr val="222222"/>
-                </a:solidFill>
-              </a:rPr>
-              <a:t>- Optional: second reference channel (e.g., 104.5 Spokane) for cross-checking.</a:t>
-            </a:r>
-          </a:p>
-          <a:p>
-            <a:pPr>
-              <a:spcAft>
-                <a:spcPts val="500"/>
-              </a:spcAft>
-            </a:pPr>
-            <a:r>
-              <a:rPr sz="1800">
-                <a:solidFill>
-                  <a:srgbClr val="222222"/>
-                </a:solidFill>
-              </a:rPr>
-              <a:t>- Optional: contribute counts to citizen-science meteor networks.</a:t>
+              <a:t>- After: review snapshots, classify, plot pings-per-hour vs time &amp; vs sporadic rate.</a:t>
             </a:r>
           </a:p>
         </p:txBody>
@@ -5723,7 +5859,7 @@
                   <a:srgbClr val="999999"/>
                 </a:solidFill>
               </a:rPr>
-              <a:t>code v1.4  ·  2026-07-12  ·  16/17</a:t>
+              <a:t>code v1.5  ·  2026-07-13  ·  16/18</a:t>
             </a:r>
           </a:p>
         </p:txBody>
@@ -5774,7 +5910,7 @@
                   <a:srgbClr val="1F77B4"/>
                 </a:solidFill>
               </a:rPr>
-              <a:t>Caveats &amp; limitations</a:t>
+              <a:t>Next steps</a:t>
             </a:r>
           </a:p>
         </p:txBody>
@@ -5855,7 +5991,7 @@
                   <a:srgbClr val="222222"/>
                 </a:solidFill>
               </a:rPr>
-              <a:t>- Small whip antenna limits sensitivity -&gt; expect low ping rates for now.</a:t>
+              <a:t>- Antenna upgrade (biggest sensitivity gain): dipole/Yagi aimed SE to Boise.</a:t>
             </a:r>
           </a:p>
           <a:p>
@@ -5870,7 +6006,22 @@
                   <a:srgbClr val="222222"/>
                 </a:solidFill>
               </a:rPr>
-              <a:t>- Summer sporadic-E (Jun-Aug) can cause false pings; distinguish by duration.</a:t>
+              <a:t>- Real-hardware validation of v1.3/v1.4 -- all of it is so far verified HEADLESSLY</a:t>
+            </a:r>
+          </a:p>
+          <a:p>
+            <a:pPr lvl="1">
+              <a:spcAft>
+                <a:spcPts val="500"/>
+              </a:spcAft>
+            </a:pPr>
+            <a:r>
+              <a:rPr sz="1600">
+                <a:solidFill>
+                  <a:srgbClr val="555555"/>
+                </a:solidFill>
+              </a:rPr>
+              <a:t>  . on Windows against synthetic sources; the Pi run is still pending.</a:t>
             </a:r>
           </a:p>
           <a:p>
@@ -5885,7 +6036,7 @@
                   <a:srgbClr val="222222"/>
                 </a:solidFill>
               </a:rPr>
-              <a:t>- RTL-SDR frequency drift until warmed up / ppm-calibrated.</a:t>
+              <a:t>- Frequency calibration: rtl_test -p to set freq_correction_ppm.</a:t>
             </a:r>
           </a:p>
           <a:p>
@@ -5900,7 +6051,22 @@
                   <a:srgbClr val="222222"/>
                 </a:solidFill>
               </a:rPr>
-              <a:t>- Only one process may hold the dongle at a time.</a:t>
+              <a:t>- Longer unattended runs (overnight) to gather real event statistics, then</a:t>
+            </a:r>
+          </a:p>
+          <a:p>
+            <a:pPr lvl="1">
+              <a:spcAft>
+                <a:spcPts val="500"/>
+              </a:spcAft>
+            </a:pPr>
+            <a:r>
+              <a:rPr sz="1600">
+                <a:solidFill>
+                  <a:srgbClr val="555555"/>
+                </a:solidFill>
+              </a:rPr>
+              <a:t>  . tune classifier thresholds against confirmed events. Target: Perseids Aug 12-13.</a:t>
             </a:r>
           </a:p>
           <a:p>
@@ -5915,7 +6081,7 @@
                   <a:srgbClr val="222222"/>
                 </a:solidFill>
               </a:rPr>
-              <a:t>- pyrtlsdr patch lives in site-packages; a reinstall reverts it.</a:t>
+              <a:t>- Later: trained classifier; dark theme + MHz axis polish; package as an .exe.</a:t>
             </a:r>
           </a:p>
           <a:p>
@@ -5930,22 +6096,7 @@
                   <a:srgbClr val="222222"/>
                 </a:solidFill>
               </a:rPr>
-              <a:t>- Classification (v1.2+) is HEURISTIC, not trained -- treat labels as triage, and</a:t>
-            </a:r>
-          </a:p>
-          <a:p>
-            <a:pPr lvl="1">
-              <a:spcAft>
-                <a:spcPts val="500"/>
-              </a:spcAft>
-            </a:pPr>
-            <a:r>
-              <a:rPr sz="1600">
-                <a:solidFill>
-                  <a:srgbClr val="555555"/>
-                </a:solidFill>
-              </a:rPr>
-              <a:t>  . expect to tune the thresholds in config.py against confirmed events.</a:t>
+              <a:t>- Optional: second reference channel (e.g., 104.5 Spokane) for cross-checking.</a:t>
             </a:r>
           </a:p>
           <a:p>
@@ -5960,22 +6111,7 @@
                   <a:srgbClr val="222222"/>
                 </a:solidFill>
               </a:rPr>
-              <a:t>- Under heavy load a SNAPSHOT may be dropped (v1.3/v1.4 governors) -- the EVENT is</a:t>
-            </a:r>
-          </a:p>
-          <a:p>
-            <a:pPr lvl="1">
-              <a:spcAft>
-                <a:spcPts val="500"/>
-              </a:spcAft>
-            </a:pPr>
-            <a:r>
-              <a:rPr sz="1600">
-                <a:solidFill>
-                  <a:srgbClr val="555555"/>
-                </a:solidFill>
-              </a:rPr>
-              <a:t>  . always still classified and logged, so the counts never suffer.</a:t>
+              <a:t>- Optional: contribute counts to citizen-science meteor networks.</a:t>
             </a:r>
           </a:p>
         </p:txBody>
@@ -6042,7 +6178,326 @@
                   <a:srgbClr val="999999"/>
                 </a:solidFill>
               </a:rPr>
-              <a:t>code v1.4  ·  2026-07-12  ·  17/17</a:t>
+              <a:t>code v1.5  ·  2026-07-13  ·  17/18</a:t>
+            </a:r>
+          </a:p>
+        </p:txBody>
+      </p:sp>
+    </p:spTree>
+  </p:cSld>
+  <p:clrMapOvr>
+    <a:masterClrMapping/>
+  </p:clrMapOvr>
+</p:sld>
+</file>
+
+<file path=ppt/slides/slide18.xml><?xml version="1.0" encoding="utf-8"?>
+<p:sld xmlns:a="http://schemas.openxmlformats.org/drawingml/2006/main" xmlns:p="http://schemas.openxmlformats.org/presentationml/2006/main" xmlns:r="http://schemas.openxmlformats.org/officeDocument/2006/relationships">
+  <p:cSld>
+    <p:spTree>
+      <p:nvGrpSpPr>
+        <p:cNvPr id="1" name=""/>
+        <p:cNvGrpSpPr/>
+        <p:nvPr/>
+      </p:nvGrpSpPr>
+      <p:grpSpPr/>
+      <p:sp>
+        <p:nvSpPr>
+          <p:cNvPr id="2" name="TextBox 1"/>
+          <p:cNvSpPr txBox="1"/>
+          <p:nvPr/>
+        </p:nvSpPr>
+        <p:spPr>
+          <a:xfrm>
+            <a:off x="548640" y="320040"/>
+            <a:ext cx="11064240" cy="914400"/>
+          </a:xfrm>
+          <a:prstGeom prst="rect">
+            <a:avLst/>
+          </a:prstGeom>
+          <a:noFill/>
+        </p:spPr>
+        <p:txBody>
+          <a:bodyPr wrap="square">
+            <a:spAutoFit/>
+          </a:bodyPr>
+          <a:lstStyle/>
+          <a:p>
+            <a:r>
+              <a:rPr sz="3000" b="1">
+                <a:solidFill>
+                  <a:srgbClr val="1F77B4"/>
+                </a:solidFill>
+              </a:rPr>
+              <a:t>Caveats &amp; limitations</a:t>
+            </a:r>
+          </a:p>
+        </p:txBody>
+      </p:sp>
+      <p:sp>
+        <p:nvSpPr>
+          <p:cNvPr id="3" name="Rectangle 2"/>
+          <p:cNvSpPr/>
+          <p:nvPr/>
+        </p:nvSpPr>
+        <p:spPr>
+          <a:xfrm>
+            <a:off x="548640" y="1234440"/>
+            <a:ext cx="11064240" cy="38100"/>
+          </a:xfrm>
+          <a:prstGeom prst="rect">
+            <a:avLst/>
+          </a:prstGeom>
+          <a:solidFill>
+            <a:srgbClr val="1F77B4"/>
+          </a:solidFill>
+          <a:ln>
+            <a:noFill/>
+          </a:ln>
+        </p:spPr>
+        <p:style>
+          <a:lnRef idx="1">
+            <a:schemeClr val="accent1"/>
+          </a:lnRef>
+          <a:fillRef idx="3">
+            <a:schemeClr val="accent1"/>
+          </a:fillRef>
+          <a:effectRef idx="2">
+            <a:schemeClr val="accent1"/>
+          </a:effectRef>
+          <a:fontRef idx="minor">
+            <a:schemeClr val="lt1"/>
+          </a:fontRef>
+        </p:style>
+        <p:txBody>
+          <a:bodyPr rtlCol="0" anchor="ctr"/>
+          <a:lstStyle/>
+          <a:p>
+            <a:pPr algn="ctr"/>
+          </a:p>
+        </p:txBody>
+      </p:sp>
+      <p:sp>
+        <p:nvSpPr>
+          <p:cNvPr id="4" name="TextBox 3"/>
+          <p:cNvSpPr txBox="1"/>
+          <p:nvPr/>
+        </p:nvSpPr>
+        <p:spPr>
+          <a:xfrm>
+            <a:off x="548640" y="1554480"/>
+            <a:ext cx="11064240" cy="4937760"/>
+          </a:xfrm>
+          <a:prstGeom prst="rect">
+            <a:avLst/>
+          </a:prstGeom>
+          <a:noFill/>
+        </p:spPr>
+        <p:txBody>
+          <a:bodyPr wrap="square">
+            <a:spAutoFit/>
+          </a:bodyPr>
+          <a:lstStyle/>
+          <a:p>
+            <a:pPr>
+              <a:spcAft>
+                <a:spcPts val="500"/>
+              </a:spcAft>
+            </a:pPr>
+            <a:r>
+              <a:rPr sz="1800">
+                <a:solidFill>
+                  <a:srgbClr val="222222"/>
+                </a:solidFill>
+              </a:rPr>
+              <a:t>- Small whip antenna limits sensitivity -&gt; expect low ping rates for now.</a:t>
+            </a:r>
+          </a:p>
+          <a:p>
+            <a:pPr>
+              <a:spcAft>
+                <a:spcPts val="500"/>
+              </a:spcAft>
+            </a:pPr>
+            <a:r>
+              <a:rPr sz="1800">
+                <a:solidFill>
+                  <a:srgbClr val="222222"/>
+                </a:solidFill>
+              </a:rPr>
+              <a:t>- Summer sporadic-E (Jun-Aug) can cause false pings; distinguish by duration.</a:t>
+            </a:r>
+          </a:p>
+          <a:p>
+            <a:pPr>
+              <a:spcAft>
+                <a:spcPts val="500"/>
+              </a:spcAft>
+            </a:pPr>
+            <a:r>
+              <a:rPr sz="1800">
+                <a:solidFill>
+                  <a:srgbClr val="222222"/>
+                </a:solidFill>
+              </a:rPr>
+              <a:t>- RTL-SDR frequency drift until warmed up / ppm-calibrated.</a:t>
+            </a:r>
+          </a:p>
+          <a:p>
+            <a:pPr>
+              <a:spcAft>
+                <a:spcPts val="500"/>
+              </a:spcAft>
+            </a:pPr>
+            <a:r>
+              <a:rPr sz="1800">
+                <a:solidFill>
+                  <a:srgbClr val="222222"/>
+                </a:solidFill>
+              </a:rPr>
+              <a:t>- Only one process may hold the dongle at a time.</a:t>
+            </a:r>
+          </a:p>
+          <a:p>
+            <a:pPr>
+              <a:spcAft>
+                <a:spcPts val="500"/>
+              </a:spcAft>
+            </a:pPr>
+            <a:r>
+              <a:rPr sz="1800">
+                <a:solidFill>
+                  <a:srgbClr val="222222"/>
+                </a:solidFill>
+              </a:rPr>
+              <a:t>- pyrtlsdr patch lives in site-packages; a reinstall reverts it.</a:t>
+            </a:r>
+          </a:p>
+          <a:p>
+            <a:pPr>
+              <a:spcAft>
+                <a:spcPts val="500"/>
+              </a:spcAft>
+            </a:pPr>
+            <a:r>
+              <a:rPr sz="1800">
+                <a:solidFill>
+                  <a:srgbClr val="222222"/>
+                </a:solidFill>
+              </a:rPr>
+              <a:t>- Classification (v1.2+) is HEURISTIC, not trained -- treat labels as triage, and</a:t>
+            </a:r>
+          </a:p>
+          <a:p>
+            <a:pPr lvl="1">
+              <a:spcAft>
+                <a:spcPts val="500"/>
+              </a:spcAft>
+            </a:pPr>
+            <a:r>
+              <a:rPr sz="1600">
+                <a:solidFill>
+                  <a:srgbClr val="555555"/>
+                </a:solidFill>
+              </a:rPr>
+              <a:t>  . expect to tune the thresholds in config.py against confirmed events.</a:t>
+            </a:r>
+          </a:p>
+          <a:p>
+            <a:pPr>
+              <a:spcAft>
+                <a:spcPts val="500"/>
+              </a:spcAft>
+            </a:pPr>
+            <a:r>
+              <a:rPr sz="1800">
+                <a:solidFill>
+                  <a:srgbClr val="222222"/>
+                </a:solidFill>
+              </a:rPr>
+              <a:t>- Under heavy load a SNAPSHOT may be dropped (v1.3/v1.4 governors) -- the EVENT is</a:t>
+            </a:r>
+          </a:p>
+          <a:p>
+            <a:pPr lvl="1">
+              <a:spcAft>
+                <a:spcPts val="500"/>
+              </a:spcAft>
+            </a:pPr>
+            <a:r>
+              <a:rPr sz="1600">
+                <a:solidFill>
+                  <a:srgbClr val="555555"/>
+                </a:solidFill>
+              </a:rPr>
+              <a:t>  . always still classified and logged, so the counts never suffer.</a:t>
+            </a:r>
+          </a:p>
+        </p:txBody>
+      </p:sp>
+      <p:sp>
+        <p:nvSpPr>
+          <p:cNvPr id="5" name="TextBox 4"/>
+          <p:cNvSpPr txBox="1"/>
+          <p:nvPr/>
+        </p:nvSpPr>
+        <p:spPr>
+          <a:xfrm>
+            <a:off x="365760" y="6510528"/>
+            <a:ext cx="7772400" cy="274320"/>
+          </a:xfrm>
+          <a:prstGeom prst="rect">
+            <a:avLst/>
+          </a:prstGeom>
+          <a:noFill/>
+        </p:spPr>
+        <p:txBody>
+          <a:bodyPr wrap="none">
+            <a:spAutoFit/>
+          </a:bodyPr>
+          <a:lstStyle/>
+          <a:p>
+            <a:r>
+              <a:rPr sz="900">
+                <a:solidFill>
+                  <a:srgbClr val="999999"/>
+                </a:solidFill>
+              </a:rPr>
+              <a:t>Radio Meteor Tracker  ·  Code &amp; Versions</a:t>
+            </a:r>
+          </a:p>
+        </p:txBody>
+      </p:sp>
+      <p:sp>
+        <p:nvSpPr>
+          <p:cNvPr id="6" name="TextBox 5"/>
+          <p:cNvSpPr txBox="1"/>
+          <p:nvPr/>
+        </p:nvSpPr>
+        <p:spPr>
+          <a:xfrm>
+            <a:off x="8229600" y="6510528"/>
+            <a:ext cx="3566160" cy="274320"/>
+          </a:xfrm>
+          <a:prstGeom prst="rect">
+            <a:avLst/>
+          </a:prstGeom>
+          <a:noFill/>
+        </p:spPr>
+        <p:txBody>
+          <a:bodyPr wrap="none">
+            <a:spAutoFit/>
+          </a:bodyPr>
+          <a:lstStyle/>
+          <a:p>
+            <a:pPr algn="r"/>
+            <a:r>
+              <a:rPr sz="900">
+                <a:solidFill>
+                  <a:srgbClr val="999999"/>
+                </a:solidFill>
+              </a:rPr>
+              <a:t>code v1.5  ·  2026-07-13  ·  18/18</a:t>
             </a:r>
           </a:p>
         </p:txBody>
@@ -6346,7 +6801,7 @@
                   <a:srgbClr val="999999"/>
                 </a:solidFill>
               </a:rPr>
-              <a:t>code v1.4  ·  2026-07-12  ·  2/17</a:t>
+              <a:t>code v1.5  ·  2026-07-13  ·  2/18</a:t>
             </a:r>
           </a:p>
         </p:txBody>
@@ -6650,7 +7105,7 @@
                   <a:srgbClr val="999999"/>
                 </a:solidFill>
               </a:rPr>
-              <a:t>code v1.4  ·  2026-07-12  ·  3/17</a:t>
+              <a:t>code v1.5  ·  2026-07-13  ·  3/18</a:t>
             </a:r>
           </a:p>
         </p:txBody>
@@ -6969,7 +7424,7 @@
                   <a:srgbClr val="999999"/>
                 </a:solidFill>
               </a:rPr>
-              <a:t>code v1.4  ·  2026-07-12  ·  4/17</a:t>
+              <a:t>code v1.5  ·  2026-07-13  ·  4/18</a:t>
             </a:r>
           </a:p>
         </p:txBody>
@@ -7273,7 +7728,7 @@
                   <a:srgbClr val="999999"/>
                 </a:solidFill>
               </a:rPr>
-              <a:t>code v1.4  ·  2026-07-12  ·  5/17</a:t>
+              <a:t>code v1.5  ·  2026-07-13  ·  5/18</a:t>
             </a:r>
           </a:p>
         </p:txBody>
@@ -7577,7 +8032,7 @@
                   <a:srgbClr val="999999"/>
                 </a:solidFill>
               </a:rPr>
-              <a:t>code v1.4  ·  2026-07-12  ·  6/17</a:t>
+              <a:t>code v1.5  ·  2026-07-13  ·  6/18</a:t>
             </a:r>
           </a:p>
         </p:txBody>
@@ -7866,7 +8321,7 @@
                   <a:srgbClr val="999999"/>
                 </a:solidFill>
               </a:rPr>
-              <a:t>code v1.4  ·  2026-07-12  ·  7/17</a:t>
+              <a:t>code v1.5  ·  2026-07-13  ·  7/18</a:t>
             </a:r>
           </a:p>
         </p:txBody>
@@ -8209,7 +8664,7 @@
                   <a:srgbClr val="999999"/>
                 </a:solidFill>
               </a:rPr>
-              <a:t>code v1.4  ·  2026-07-12  ·  8/17</a:t>
+              <a:t>code v1.5  ·  2026-07-13  ·  8/18</a:t>
             </a:r>
           </a:p>
         </p:txBody>
@@ -8507,7 +8962,7 @@
                   <a:srgbClr val="999999"/>
                 </a:solidFill>
               </a:rPr>
-              <a:t>code v1.4  ·  2026-07-12  ·  9/17</a:t>
+              <a:t>code v1.5  ·  2026-07-13  ·  9/18</a:t>
             </a:r>
           </a:p>
         </p:txBody>
